--- a/2026-Q3/Devotionals/TrainedToTellTheDifference.pptx
+++ b/2026-Q3/Devotionals/TrainedToTellTheDifference.pptx
@@ -2033,7 +2033,7 @@
               <a:buNone/>
             </a:pPr>
             <a:r>
-              <a:rPr lang="en-US" sz="1600" b="1" i="1" dirty="0">
+              <a:rPr lang="en-US" sz="1600" b="1" i="1" u="sng" dirty="0">
                 <a:solidFill>
                   <a:srgbClr val="FFFFFF"/>
                 </a:solidFill>
@@ -2120,7 +2120,7 @@
               <a:buNone/>
             </a:pPr>
             <a:r>
-              <a:rPr lang="en-US" sz="1600" b="1" i="1" dirty="0">
+              <a:rPr lang="en-US" sz="1600" b="1" i="1" u="sng" dirty="0">
                 <a:solidFill>
                   <a:srgbClr val="FFFFFF"/>
                 </a:solidFill>
@@ -2207,7 +2207,7 @@
               <a:buNone/>
             </a:pPr>
             <a:r>
-              <a:rPr lang="en-US" sz="1600" b="1" i="1" dirty="0">
+              <a:rPr lang="en-US" sz="1600" b="1" i="1" u="sng" dirty="0">
                 <a:solidFill>
                   <a:srgbClr val="FFFFFF"/>
                 </a:solidFill>
@@ -2294,6 +2294,17 @@
               <a:buNone/>
             </a:pPr>
             <a:r>
+              <a:rPr lang="en-US" sz="1600" b="1" i="1" u="sng" dirty="0">
+                <a:solidFill>
+                  <a:srgbClr val="FFFFFF"/>
+                </a:solidFill>
+                <a:latin typeface="Arial" pitchFamily="34" charset="0"/>
+                <a:ea typeface="Arial" pitchFamily="34" charset="-122"/>
+                <a:cs typeface="Arial" pitchFamily="34" charset="-120"/>
+              </a:rPr>
+              <a:t>Obedience of Faith</a:t>
+            </a:r>
+            <a:r>
               <a:rPr lang="en-US" sz="1600" b="1" i="1" dirty="0">
                 <a:solidFill>
                   <a:srgbClr val="FFFFFF"/>
@@ -2302,7 +2313,7 @@
                 <a:ea typeface="Arial" pitchFamily="34" charset="-122"/>
                 <a:cs typeface="Arial" pitchFamily="34" charset="-120"/>
               </a:rPr>
-              <a:t>Obedience of Faith </a:t>
+              <a:t> </a:t>
             </a:r>
             <a:r>
               <a:rPr lang="en-US" sz="1600" b="1" dirty="0">
@@ -2327,8 +2338,8 @@
         </p:nvSpPr>
         <p:spPr>
           <a:xfrm>
-            <a:off x="5806440" y="2514599"/>
-            <a:ext cx="3017520" cy="3361267"/>
+            <a:off x="5806440" y="2855467"/>
+            <a:ext cx="3017520" cy="2921001"/>
           </a:xfrm>
           <a:prstGeom prst="rect">
             <a:avLst/>
@@ -4314,7 +4325,7 @@
         <p:spPr>
           <a:xfrm>
             <a:off x="320040" y="3593254"/>
-            <a:ext cx="8503920" cy="1600200"/>
+            <a:ext cx="8503920" cy="1715346"/>
           </a:xfrm>
           <a:prstGeom prst="rect">
             <a:avLst/>
@@ -4326,9 +4337,7 @@
           <a:bodyPr wrap="square" lIns="0" tIns="0" rIns="0" bIns="0" rtlCol="0" anchor="t"/>
           <a:lstStyle/>
           <a:p>
-            <a:pPr marL="0" indent="0" algn="l">
-              <a:buNone/>
-            </a:pPr>
+            <a:pPr algn="l"/>
             <a:r>
               <a:rPr lang="en-US" b="1" dirty="0">
                 <a:solidFill>
@@ -4339,7 +4348,7 @@
                 <a:cs typeface="Arial" pitchFamily="34" charset="-120"/>
               </a:rPr>
               <a:t>But look at what he was teaching when he stopped:
-</a:t>
+    </a:t>
             </a:r>
             <a:r>
               <a:rPr lang="en-US" dirty="0">
@@ -4396,7 +4405,7 @@
                 <a:cs typeface="Arial" pitchFamily="34" charset="-120"/>
               </a:rPr>
               <a:t>
-v.11 </a:t>
+    v.11 </a:t>
             </a:r>
             <a:r>
               <a:rPr lang="en-US" dirty="0">
@@ -4444,6 +4453,9 @@
               <a:t>
 </a:t>
             </a:r>
+          </a:p>
+          <a:p>
+            <a:pPr algn="l"/>
             <a:r>
               <a:rPr lang="en-US" b="1" u="sng" dirty="0">
                 <a:solidFill>
@@ -4467,7 +4479,7 @@
         </p:nvSpPr>
         <p:spPr>
           <a:xfrm>
-            <a:off x="320040" y="5394960"/>
+            <a:off x="320040" y="5538893"/>
             <a:ext cx="8503920" cy="896112"/>
           </a:xfrm>
           <a:prstGeom prst="rect">
@@ -4495,6 +4507,11 @@
               <a:t>So that is our meal today…  Four concepts, one question, and a training plan.
 </a:t>
             </a:r>
+          </a:p>
+          <a:p>
+            <a:pPr marL="0" indent="0" algn="l">
+              <a:buNone/>
+            </a:pPr>
             <a:r>
               <a:rPr lang="en-US" i="1" dirty="0">
                 <a:solidFill>
@@ -4527,7 +4544,7 @@
                 <a:ea typeface="Arial" pitchFamily="34" charset="-122"/>
                 <a:cs typeface="Arial" pitchFamily="34" charset="-120"/>
               </a:rPr>
-              <a:t> for you, for your children, your wife, your family, your church.</a:t>
+              <a:t> for you, your family, your church.</a:t>
             </a:r>
             <a:endParaRPr lang="en-US" dirty="0"/>
           </a:p>
@@ -5150,7 +5167,7 @@
                 <a:ea typeface="Arial" pitchFamily="34" charset="-122"/>
                 <a:cs typeface="Arial" pitchFamily="34" charset="-120"/>
               </a:rPr>
-              <a:t>James says a man can practice the form, deceive his heart </a:t>
+              <a:t>James says a man can practice the form; deceive his heart </a:t>
             </a:r>
             <a:r>
               <a:rPr lang="en-US" dirty="0">
@@ -6934,7 +6951,7 @@
                 <a:ea typeface="Arial" pitchFamily="34" charset="-122"/>
                 <a:cs typeface="Arial" pitchFamily="34" charset="-120"/>
               </a:rPr>
-              <a:t>SAUL </a:t>
+              <a:t>Saul </a:t>
             </a:r>
             <a:r>
               <a:rPr lang="en-US" dirty="0">
@@ -7008,8 +7025,35 @@
                 <a:ea typeface="Arial" pitchFamily="34" charset="-122"/>
                 <a:cs typeface="Arial" pitchFamily="34" charset="-120"/>
               </a:rPr>
-              <a:t>“Does the Lord take pleasure in burnt offerings and sacrifices as much as he does in obedience? Certainly, obedience is better than sacrifice.” </a:t>
-            </a:r>
+              <a:t>“Does the Lord take pleasure in burnt offerings and sacrifices as much as he does in obedience? Certainly, </a:t>
+            </a:r>
+            <a:r>
+              <a:rPr lang="en-US" b="1" i="1" u="sng" dirty="0">
+                <a:solidFill>
+                  <a:srgbClr val="000000"/>
+                </a:solidFill>
+                <a:latin typeface="Arial" pitchFamily="34" charset="0"/>
+                <a:ea typeface="Arial" pitchFamily="34" charset="-122"/>
+                <a:cs typeface="Arial" pitchFamily="34" charset="-120"/>
+              </a:rPr>
+              <a:t>obedience is better than sacrifice</a:t>
+            </a:r>
+            <a:r>
+              <a:rPr lang="en-US" b="1" i="1" dirty="0">
+                <a:solidFill>
+                  <a:srgbClr val="000000"/>
+                </a:solidFill>
+                <a:latin typeface="Arial" pitchFamily="34" charset="0"/>
+                <a:ea typeface="Arial" pitchFamily="34" charset="-122"/>
+                <a:cs typeface="Arial" pitchFamily="34" charset="-120"/>
+              </a:rPr>
+              <a:t>.” </a:t>
+            </a:r>
+          </a:p>
+          <a:p>
+            <a:pPr marL="0" indent="0" algn="l">
+              <a:buNone/>
+            </a:pPr>
             <a:r>
               <a:rPr lang="en-US" b="1" dirty="0">
                 <a:solidFill>
@@ -7802,6 +7846,11 @@
               </a:rPr>
               <a:t>“I have done what the Lord said.” </a:t>
             </a:r>
+          </a:p>
+          <a:p>
+            <a:pPr marL="0" indent="0" algn="l">
+              <a:buNone/>
+            </a:pPr>
             <a:r>
               <a:rPr lang="en-US" sz="1100" b="1" dirty="0">
                 <a:solidFill>
@@ -7899,6 +7948,11 @@
               </a:rPr>
               <a:t>“We did not seek him according to the prescribed ordinance.” </a:t>
             </a:r>
+          </a:p>
+          <a:p>
+            <a:pPr marL="0" indent="0" algn="l">
+              <a:buNone/>
+            </a:pPr>
             <a:r>
               <a:rPr lang="en-US" sz="1100" b="1" dirty="0">
                 <a:solidFill>

--- a/2026-Q3/Devotionals/TrainedToTellTheDifference.pptx
+++ b/2026-Q3/Devotionals/TrainedToTellTheDifference.pptx
@@ -1808,7 +1808,7 @@
                 <a:cs typeface="Arial" pitchFamily="34" charset="-120"/>
                 <a:sym typeface="Wingdings" pitchFamily="2" charset="2"/>
               </a:rPr>
-              <a:t> First by the King</a:t>
+              <a:t> First by our King</a:t>
             </a:r>
             <a:endParaRPr lang="en-US" sz="1600" dirty="0"/>
           </a:p>
@@ -1955,7 +1955,29 @@
                 <a:ea typeface="Arial" pitchFamily="34" charset="-122"/>
                 <a:cs typeface="Arial" pitchFamily="34" charset="-120"/>
               </a:rPr>
-              <a:t> to do your will, O God.’” </a:t>
+              <a:t> </a:t>
+            </a:r>
+            <a:r>
+              <a:rPr lang="en-US" sz="2000" b="1" i="1" u="sng" dirty="0">
+                <a:solidFill>
+                  <a:srgbClr val="000000"/>
+                </a:solidFill>
+                <a:latin typeface="Arial" pitchFamily="34" charset="0"/>
+                <a:ea typeface="Arial" pitchFamily="34" charset="-122"/>
+                <a:cs typeface="Arial" pitchFamily="34" charset="-120"/>
+              </a:rPr>
+              <a:t>to do your will</a:t>
+            </a:r>
+            <a:r>
+              <a:rPr lang="en-US" sz="2000" b="1" i="1" dirty="0">
+                <a:solidFill>
+                  <a:srgbClr val="000000"/>
+                </a:solidFill>
+                <a:latin typeface="Arial" pitchFamily="34" charset="0"/>
+                <a:ea typeface="Arial" pitchFamily="34" charset="-122"/>
+                <a:cs typeface="Arial" pitchFamily="34" charset="-120"/>
+              </a:rPr>
+              <a:t>, O God.’” </a:t>
             </a:r>
             <a:r>
               <a:rPr lang="en-US" sz="2000" b="1" dirty="0">
@@ -2375,7 +2397,29 @@
                 <a:ea typeface="Arial" pitchFamily="34" charset="-122"/>
                 <a:cs typeface="Arial" pitchFamily="34" charset="-120"/>
               </a:rPr>
-              <a:t>“By that will we have been made holy </a:t>
+              <a:t>“By that </a:t>
+            </a:r>
+            <a:r>
+              <a:rPr lang="en-US" b="1" i="1" u="sng" dirty="0">
+                <a:solidFill>
+                  <a:srgbClr val="000000"/>
+                </a:solidFill>
+                <a:latin typeface="Arial" pitchFamily="34" charset="0"/>
+                <a:ea typeface="Arial" pitchFamily="34" charset="-122"/>
+                <a:cs typeface="Arial" pitchFamily="34" charset="-120"/>
+              </a:rPr>
+              <a:t>will</a:t>
+            </a:r>
+            <a:r>
+              <a:rPr lang="en-US" b="1" i="1" dirty="0">
+                <a:solidFill>
+                  <a:srgbClr val="000000"/>
+                </a:solidFill>
+                <a:latin typeface="Arial" pitchFamily="34" charset="0"/>
+                <a:ea typeface="Arial" pitchFamily="34" charset="-122"/>
+                <a:cs typeface="Arial" pitchFamily="34" charset="-120"/>
+              </a:rPr>
+              <a:t> we have been made holy </a:t>
             </a:r>
             <a:r>
               <a:rPr lang="en-US" b="1" i="1" dirty="0">
@@ -6974,7 +7018,7 @@
                 <a:ea typeface="Arial" pitchFamily="34" charset="-122"/>
                 <a:cs typeface="Arial" pitchFamily="34" charset="-120"/>
               </a:rPr>
-              <a:t> real animals, real altar, edited command (1 Sam 15)</a:t>
+              <a:t> real animals, real altar, edited command, partial obedience (1 Sam 15)</a:t>
             </a:r>
             <a:endParaRPr lang="en-US" sz="1600" dirty="0"/>
           </a:p>
@@ -8085,7 +8129,7 @@
         <p:spPr>
           <a:xfrm>
             <a:off x="365760" y="4919472"/>
-            <a:ext cx="8412480" cy="1234440"/>
+            <a:ext cx="8549640" cy="1234440"/>
           </a:xfrm>
           <a:prstGeom prst="rect">
             <a:avLst/>
@@ -8142,7 +8186,7 @@
               <a:buNone/>
             </a:pPr>
             <a:r>
-              <a:rPr lang="en-US" sz="1600" b="1" u="sng" dirty="0">
+              <a:rPr lang="en-US" b="1" u="sng" dirty="0">
                 <a:solidFill>
                   <a:srgbClr val="000000"/>
                 </a:solidFill>
@@ -8153,7 +8197,7 @@
               <a:t>Discernment</a:t>
             </a:r>
             <a:r>
-              <a:rPr lang="en-US" sz="1600" b="1" dirty="0">
+              <a:rPr lang="en-US" b="1" dirty="0">
                 <a:solidFill>
                   <a:srgbClr val="000000"/>
                 </a:solidFill>
@@ -8164,7 +8208,7 @@
               <a:t> = telling </a:t>
             </a:r>
             <a:r>
-              <a:rPr lang="en-US" sz="1600" b="1" u="sng" dirty="0">
+              <a:rPr lang="en-US" b="1" u="sng" dirty="0">
                 <a:solidFill>
                   <a:srgbClr val="000000"/>
                 </a:solidFill>
@@ -8175,7 +8219,7 @@
               <a:t>form</a:t>
             </a:r>
             <a:r>
-              <a:rPr lang="en-US" sz="1600" b="1" dirty="0">
+              <a:rPr lang="en-US" b="1" dirty="0">
                 <a:solidFill>
                   <a:srgbClr val="000000"/>
                 </a:solidFill>
@@ -8186,7 +8230,7 @@
               <a:t> from </a:t>
             </a:r>
             <a:r>
-              <a:rPr lang="en-US" sz="1600" b="1" u="sng" dirty="0">
+              <a:rPr lang="en-US" b="1" u="sng" dirty="0">
                 <a:solidFill>
                   <a:srgbClr val="000000"/>
                 </a:solidFill>
@@ -8197,7 +8241,7 @@
               <a:t>disposition</a:t>
             </a:r>
             <a:r>
-              <a:rPr lang="en-US" sz="1600" b="1" dirty="0">
+              <a:rPr lang="en-US" b="1" dirty="0">
                 <a:solidFill>
                   <a:srgbClr val="000000"/>
                 </a:solidFill>
@@ -8208,7 +8252,7 @@
               <a:t> from </a:t>
             </a:r>
             <a:r>
-              <a:rPr lang="en-US" sz="1600" b="1" u="sng" dirty="0">
+              <a:rPr lang="en-US" b="1" u="sng" dirty="0">
                 <a:solidFill>
                   <a:srgbClr val="000000"/>
                 </a:solidFill>
@@ -8219,7 +8263,7 @@
               <a:t>cost</a:t>
             </a:r>
             <a:r>
-              <a:rPr lang="en-US" sz="1600" b="1" dirty="0">
+              <a:rPr lang="en-US" b="1" dirty="0">
                 <a:solidFill>
                   <a:srgbClr val="000000"/>
                 </a:solidFill>
@@ -8230,7 +8274,7 @@
               <a:t> from settled </a:t>
             </a:r>
             <a:r>
-              <a:rPr lang="en-US" sz="1600" b="1" u="sng" dirty="0">
+              <a:rPr lang="en-US" b="1" u="sng" dirty="0">
                 <a:solidFill>
                   <a:srgbClr val="000000"/>
                 </a:solidFill>
@@ -8241,7 +8285,7 @@
               <a:t>obedience</a:t>
             </a:r>
             <a:r>
-              <a:rPr lang="en-US" sz="1600" b="1" dirty="0">
+              <a:rPr lang="en-US" b="1" dirty="0">
                 <a:solidFill>
                   <a:srgbClr val="000000"/>
                 </a:solidFill>
@@ -8251,7 +8295,7 @@
               </a:rPr>
               <a:t>.</a:t>
             </a:r>
-            <a:endParaRPr lang="en-US" sz="1600" dirty="0"/>
+            <a:endParaRPr lang="en-US" dirty="0"/>
           </a:p>
         </p:txBody>
       </p:sp>
@@ -11444,7 +11488,30 @@
                 <a:ea typeface="Arial" pitchFamily="34" charset="-122"/>
                 <a:cs typeface="Arial" pitchFamily="34" charset="-120"/>
               </a:rPr>
-              <a:t>Living sacrifice and trained perception are verses one and two of the same paragraph. Renewing your mind in the Word is your sacrifice — the daily portion of it.</a:t>
+              <a:t>Living sacrifice and trained perception are verses one and two of the same paragraph. Renewing your mind in the Word is your sacrifice </a:t>
+            </a:r>
+            <a:r>
+              <a:rPr lang="en-US" dirty="0">
+                <a:solidFill>
+                  <a:srgbClr val="000000"/>
+                </a:solidFill>
+                <a:latin typeface="Arial" pitchFamily="34" charset="0"/>
+                <a:ea typeface="Arial" pitchFamily="34" charset="-122"/>
+                <a:cs typeface="Arial" pitchFamily="34" charset="-120"/>
+                <a:sym typeface="Wingdings" pitchFamily="2" charset="2"/>
+              </a:rPr>
+              <a:t></a:t>
+            </a:r>
+            <a:r>
+              <a:rPr lang="en-US" dirty="0">
+                <a:solidFill>
+                  <a:srgbClr val="000000"/>
+                </a:solidFill>
+                <a:latin typeface="Arial" pitchFamily="34" charset="0"/>
+                <a:ea typeface="Arial" pitchFamily="34" charset="-122"/>
+                <a:cs typeface="Arial" pitchFamily="34" charset="-120"/>
+              </a:rPr>
+              <a:t> the daily portion of it.</a:t>
             </a:r>
             <a:endParaRPr lang="en-US" dirty="0"/>
           </a:p>

--- a/2026-Q3/Devotionals/TrainedToTellTheDifference.pptx
+++ b/2026-Q3/Devotionals/TrainedToTellTheDifference.pptx
@@ -10608,7 +10608,7 @@
                 <a:ea typeface="Arial" pitchFamily="34" charset="-122"/>
                 <a:cs typeface="Arial" pitchFamily="34" charset="-120"/>
               </a:rPr>
-              <a:t>The Question of the This Day</a:t>
+              <a:t>The Question of This Day</a:t>
             </a:r>
             <a:endParaRPr lang="en-US" sz="1600" dirty="0"/>
           </a:p>
@@ -10670,7 +10670,7 @@
                 <a:ea typeface="Arial" pitchFamily="34" charset="-122"/>
                 <a:cs typeface="Arial" pitchFamily="34" charset="-120"/>
               </a:rPr>
-              <a:t> your best, or the leftovers?</a:t>
+              <a:t> Your best, or the leftovers?</a:t>
             </a:r>
             <a:endParaRPr lang="en-US" sz="2400" dirty="0"/>
           </a:p>
@@ -12141,33 +12141,15 @@
                                   </p:childTnLst>
                                 </p:cTn>
                               </p:par>
-                            </p:childTnLst>
-                          </p:cTn>
-                        </p:par>
-                      </p:childTnLst>
-                    </p:cTn>
-                  </p:par>
-                  <p:par>
-                    <p:cTn id="21" fill="hold">
-                      <p:stCondLst>
-                        <p:cond delay="indefinite"/>
-                      </p:stCondLst>
-                      <p:childTnLst>
-                        <p:par>
-                          <p:cTn id="22" fill="hold">
-                            <p:stCondLst>
-                              <p:cond delay="0"/>
-                            </p:stCondLst>
-                            <p:childTnLst>
                               <p:par>
-                                <p:cTn id="23" presetID="42" presetClass="entr" presetSubtype="0" fill="hold" nodeType="clickEffect">
+                                <p:cTn id="21" presetID="42" presetClass="entr" presetSubtype="0" fill="hold" nodeType="withEffect">
                                   <p:stCondLst>
                                     <p:cond delay="0"/>
                                   </p:stCondLst>
                                   <p:childTnLst>
                                     <p:set>
                                       <p:cBhvr>
-                                        <p:cTn id="24" dur="1" fill="hold">
+                                        <p:cTn id="22" dur="1" fill="hold">
                                           <p:stCondLst>
                                             <p:cond delay="0"/>
                                           </p:stCondLst>
@@ -12185,7 +12167,7 @@
                                     </p:set>
                                     <p:animEffect transition="in" filter="fade">
                                       <p:cBhvr>
-                                        <p:cTn id="25" dur="1000"/>
+                                        <p:cTn id="23" dur="1000"/>
                                         <p:tgtEl>
                                           <p:spTgt spid="7"/>
                                         </p:tgtEl>
@@ -12193,7 +12175,7 @@
                                     </p:animEffect>
                                     <p:anim calcmode="lin" valueType="num">
                                       <p:cBhvr>
-                                        <p:cTn id="26" dur="1000" fill="hold"/>
+                                        <p:cTn id="24" dur="1000" fill="hold"/>
                                         <p:tgtEl>
                                           <p:spTgt spid="7"/>
                                         </p:tgtEl>
@@ -12224,26 +12206,26 @@
                     </p:cTn>
                   </p:par>
                   <p:par>
-                    <p:cTn id="27" fill="hold">
+                    <p:cTn id="25" fill="hold">
                       <p:stCondLst>
                         <p:cond delay="indefinite"/>
                       </p:stCondLst>
                       <p:childTnLst>
                         <p:par>
-                          <p:cTn id="28" fill="hold">
+                          <p:cTn id="26" fill="hold">
                             <p:stCondLst>
                               <p:cond delay="0"/>
                             </p:stCondLst>
                             <p:childTnLst>
                               <p:par>
-                                <p:cTn id="29" presetID="42" presetClass="entr" presetSubtype="0" fill="hold" nodeType="clickEffect">
+                                <p:cTn id="27" presetID="42" presetClass="entr" presetSubtype="0" fill="hold" nodeType="clickEffect">
                                   <p:stCondLst>
                                     <p:cond delay="0"/>
                                   </p:stCondLst>
                                   <p:childTnLst>
                                     <p:set>
                                       <p:cBhvr>
-                                        <p:cTn id="30" dur="1" fill="hold">
+                                        <p:cTn id="28" dur="1" fill="hold">
                                           <p:stCondLst>
                                             <p:cond delay="0"/>
                                           </p:stCondLst>
@@ -12261,7 +12243,7 @@
                                     </p:set>
                                     <p:animEffect transition="in" filter="fade">
                                       <p:cBhvr>
-                                        <p:cTn id="31" dur="1000"/>
+                                        <p:cTn id="29" dur="1000"/>
                                         <p:tgtEl>
                                           <p:spTgt spid="8"/>
                                         </p:tgtEl>
@@ -12269,7 +12251,7 @@
                                     </p:animEffect>
                                     <p:anim calcmode="lin" valueType="num">
                                       <p:cBhvr>
-                                        <p:cTn id="32" dur="1000" fill="hold"/>
+                                        <p:cTn id="30" dur="1000" fill="hold"/>
                                         <p:tgtEl>
                                           <p:spTgt spid="8"/>
                                         </p:tgtEl>
